--- a/Reporte 010626.pptx
+++ b/Reporte 010626.pptx
@@ -6269,10 +6269,10 @@
       </p:sp>
       <p:pic>
         <p:nvPicPr>
-          <p:cNvPr id="3" name="Imagen 2">
+          <p:cNvPr id="4" name="Imagen 3">
             <a:extLst>
               <a:ext uri="{FF2B5EF4-FFF2-40B4-BE49-F238E27FC236}">
-                <a16:creationId xmlns:a16="http://schemas.microsoft.com/office/drawing/2014/main" id="{39C6B1BD-149D-E0BE-1430-648658C12465}"/>
+                <a16:creationId xmlns:a16="http://schemas.microsoft.com/office/drawing/2014/main" id="{AC9752BB-317F-C897-824B-26F15760DBAB}"/>
               </a:ext>
             </a:extLst>
           </p:cNvPr>
@@ -6289,8 +6289,8 @@
         </p:blipFill>
         <p:spPr>
           <a:xfrm>
-            <a:off x="-6725" y="1348462"/>
-            <a:ext cx="9144000" cy="2589451"/>
+            <a:off x="0" y="1344780"/>
+            <a:ext cx="9144000" cy="2596816"/>
           </a:xfrm>
           <a:prstGeom prst="rect">
             <a:avLst/>
@@ -6373,10 +6373,10 @@
       </p:sp>
       <p:pic>
         <p:nvPicPr>
-          <p:cNvPr id="4" name="Imagen 3">
+          <p:cNvPr id="3" name="Imagen 2">
             <a:extLst>
               <a:ext uri="{FF2B5EF4-FFF2-40B4-BE49-F238E27FC236}">
-                <a16:creationId xmlns:a16="http://schemas.microsoft.com/office/drawing/2014/main" id="{85A63B61-19C3-6270-3957-A092F0B87D4E}"/>
+                <a16:creationId xmlns:a16="http://schemas.microsoft.com/office/drawing/2014/main" id="{86B2DCAA-9E75-02ED-E6ED-5FD148B941FE}"/>
               </a:ext>
             </a:extLst>
           </p:cNvPr>
@@ -6393,8 +6393,8 @@
         </p:blipFill>
         <p:spPr>
           <a:xfrm>
-            <a:off x="0" y="998747"/>
-            <a:ext cx="9144000" cy="3288881"/>
+            <a:off x="0" y="696038"/>
+            <a:ext cx="9144000" cy="3894299"/>
           </a:xfrm>
           <a:prstGeom prst="rect">
             <a:avLst/>
@@ -6471,10 +6471,10 @@
       </p:sp>
       <p:pic>
         <p:nvPicPr>
-          <p:cNvPr id="4" name="Imagen 3">
+          <p:cNvPr id="5" name="Imagen 4">
             <a:extLst>
               <a:ext uri="{FF2B5EF4-FFF2-40B4-BE49-F238E27FC236}">
-                <a16:creationId xmlns:a16="http://schemas.microsoft.com/office/drawing/2014/main" id="{2FCA8D02-301B-9D98-B02A-DA17281DD61F}"/>
+                <a16:creationId xmlns:a16="http://schemas.microsoft.com/office/drawing/2014/main" id="{20D100AF-32EB-7D55-1E85-CE2D35EA6F75}"/>
               </a:ext>
             </a:extLst>
           </p:cNvPr>
@@ -6491,8 +6491,8 @@
         </p:blipFill>
         <p:spPr>
           <a:xfrm>
-            <a:off x="0" y="1261774"/>
-            <a:ext cx="9144000" cy="2762827"/>
+            <a:off x="0" y="1270321"/>
+            <a:ext cx="9144000" cy="2745733"/>
           </a:xfrm>
           <a:prstGeom prst="rect">
             <a:avLst/>
@@ -6569,10 +6569,10 @@
       </p:sp>
       <p:pic>
         <p:nvPicPr>
-          <p:cNvPr id="4" name="Imagen 3">
+          <p:cNvPr id="3" name="Imagen 2">
             <a:extLst>
               <a:ext uri="{FF2B5EF4-FFF2-40B4-BE49-F238E27FC236}">
-                <a16:creationId xmlns:a16="http://schemas.microsoft.com/office/drawing/2014/main" id="{59D7E658-F0C1-5D0B-A444-DD43119661F2}"/>
+                <a16:creationId xmlns:a16="http://schemas.microsoft.com/office/drawing/2014/main" id="{2DB914B2-1845-19D4-2E8E-9A3C06F837D4}"/>
               </a:ext>
             </a:extLst>
           </p:cNvPr>
@@ -6589,8 +6589,8 @@
         </p:blipFill>
         <p:spPr>
           <a:xfrm>
-            <a:off x="-1" y="703321"/>
-            <a:ext cx="9144000" cy="3879734"/>
+            <a:off x="-1" y="699327"/>
+            <a:ext cx="9144000" cy="3887721"/>
           </a:xfrm>
           <a:prstGeom prst="rect">
             <a:avLst/>
@@ -6667,10 +6667,10 @@
       </p:sp>
       <p:pic>
         <p:nvPicPr>
-          <p:cNvPr id="5" name="Imagen 4">
+          <p:cNvPr id="3" name="Imagen 2">
             <a:extLst>
               <a:ext uri="{FF2B5EF4-FFF2-40B4-BE49-F238E27FC236}">
-                <a16:creationId xmlns:a16="http://schemas.microsoft.com/office/drawing/2014/main" id="{8F57E3E3-FF83-1504-9B59-6C0A5859B06F}"/>
+                <a16:creationId xmlns:a16="http://schemas.microsoft.com/office/drawing/2014/main" id="{AEFC77A2-3095-0E3E-23AE-75CCA94D051D}"/>
               </a:ext>
             </a:extLst>
           </p:cNvPr>
@@ -6687,8 +6687,8 @@
         </p:blipFill>
         <p:spPr>
           <a:xfrm>
-            <a:off x="0" y="1040168"/>
-            <a:ext cx="9144000" cy="3063164"/>
+            <a:off x="0" y="1224638"/>
+            <a:ext cx="9144000" cy="2837100"/>
           </a:xfrm>
           <a:prstGeom prst="rect">
             <a:avLst/>
@@ -7621,10 +7621,10 @@
       </p:sp>
       <p:pic>
         <p:nvPicPr>
-          <p:cNvPr id="4" name="Imagen 3">
+          <p:cNvPr id="5" name="Imagen 4">
             <a:extLst>
               <a:ext uri="{FF2B5EF4-FFF2-40B4-BE49-F238E27FC236}">
-                <a16:creationId xmlns:a16="http://schemas.microsoft.com/office/drawing/2014/main" id="{4BDC7DC0-257C-2933-2506-71554730999B}"/>
+                <a16:creationId xmlns:a16="http://schemas.microsoft.com/office/drawing/2014/main" id="{E75C169F-A291-AFD8-13B4-E3F13E303EE0}"/>
               </a:ext>
             </a:extLst>
           </p:cNvPr>
@@ -7641,8 +7641,8 @@
         </p:blipFill>
         <p:spPr>
           <a:xfrm>
-            <a:off x="0" y="827402"/>
-            <a:ext cx="9144000" cy="3488695"/>
+            <a:off x="-6725" y="895589"/>
+            <a:ext cx="9144000" cy="3495197"/>
           </a:xfrm>
           <a:prstGeom prst="rect">
             <a:avLst/>
